--- a/lesson_01-introduction_and_wearables/lesson_01-introduction_and_wearables.pptx
+++ b/lesson_01-introduction_and_wearables/lesson_01-introduction_and_wearables.pptx
@@ -5,7 +5,7 @@
     <p:sldMasterId id="2147483648" r:id="rId1"/>
   </p:sldMasterIdLst>
   <p:notesMasterIdLst>
-    <p:notesMasterId r:id="rId56"/>
+    <p:notesMasterId r:id="rId55"/>
   </p:notesMasterIdLst>
   <p:sldIdLst>
     <p:sldId id="256" r:id="rId2"/>
@@ -52,16 +52,15 @@
     <p:sldId id="343" r:id="rId43"/>
     <p:sldId id="262" r:id="rId44"/>
     <p:sldId id="263" r:id="rId45"/>
-    <p:sldId id="288" r:id="rId46"/>
-    <p:sldId id="264" r:id="rId47"/>
-    <p:sldId id="405" r:id="rId48"/>
-    <p:sldId id="397" r:id="rId49"/>
-    <p:sldId id="399" r:id="rId50"/>
-    <p:sldId id="400" r:id="rId51"/>
-    <p:sldId id="401" r:id="rId52"/>
-    <p:sldId id="404" r:id="rId53"/>
-    <p:sldId id="402" r:id="rId54"/>
-    <p:sldId id="403" r:id="rId55"/>
+    <p:sldId id="264" r:id="rId46"/>
+    <p:sldId id="405" r:id="rId47"/>
+    <p:sldId id="397" r:id="rId48"/>
+    <p:sldId id="399" r:id="rId49"/>
+    <p:sldId id="400" r:id="rId50"/>
+    <p:sldId id="401" r:id="rId51"/>
+    <p:sldId id="404" r:id="rId52"/>
+    <p:sldId id="402" r:id="rId53"/>
+    <p:sldId id="403" r:id="rId54"/>
   </p:sldIdLst>
   <p:sldSz cx="12192000" cy="6858000"/>
   <p:notesSz cx="6858000" cy="9144000"/>
@@ -1032,7 +1031,7 @@
           <a:p>
             <a:fld id="{60DFD464-F8EE-42BA-9BEF-F6DE8365F087}" type="datetimeFigureOut">
               <a:rPr lang="en-GB" smtClean="0"/>
-              <a:t>10/02/2026</a:t>
+              <a:t>23/02/2026</a:t>
             </a:fld>
             <a:endParaRPr lang="en-GB"/>
           </a:p>
@@ -1725,7 +1724,7 @@
           <a:p>
             <a:fld id="{CC0F43FB-3F33-3F4B-9768-2FBED988F992}" type="slidenum">
               <a:rPr lang="en-IT" smtClean="0"/>
-              <a:t>48</a:t>
+              <a:t>47</a:t>
             </a:fld>
             <a:endParaRPr lang="en-IT"/>
           </a:p>
@@ -1833,7 +1832,7 @@
           <a:p>
             <a:fld id="{CC0F43FB-3F33-3F4B-9768-2FBED988F992}" type="slidenum">
               <a:rPr lang="en-IT" smtClean="0"/>
-              <a:t>49</a:t>
+              <a:t>48</a:t>
             </a:fld>
             <a:endParaRPr lang="en-IT"/>
           </a:p>
@@ -1941,7 +1940,7 @@
           <a:p>
             <a:fld id="{CC0F43FB-3F33-3F4B-9768-2FBED988F992}" type="slidenum">
               <a:rPr lang="en-IT" smtClean="0"/>
-              <a:t>50</a:t>
+              <a:t>49</a:t>
             </a:fld>
             <a:endParaRPr lang="en-IT"/>
           </a:p>
@@ -2049,7 +2048,7 @@
           <a:p>
             <a:fld id="{CC0F43FB-3F33-3F4B-9768-2FBED988F992}" type="slidenum">
               <a:rPr lang="en-IT" smtClean="0"/>
-              <a:t>51</a:t>
+              <a:t>50</a:t>
             </a:fld>
             <a:endParaRPr lang="en-IT"/>
           </a:p>
@@ -2157,7 +2156,7 @@
           <a:p>
             <a:fld id="{CC0F43FB-3F33-3F4B-9768-2FBED988F992}" type="slidenum">
               <a:rPr lang="en-IT" smtClean="0"/>
-              <a:t>52</a:t>
+              <a:t>51</a:t>
             </a:fld>
             <a:endParaRPr lang="en-IT"/>
           </a:p>
@@ -2265,7 +2264,7 @@
           <a:p>
             <a:fld id="{CC0F43FB-3F33-3F4B-9768-2FBED988F992}" type="slidenum">
               <a:rPr lang="en-IT" smtClean="0"/>
-              <a:t>53</a:t>
+              <a:t>52</a:t>
             </a:fld>
             <a:endParaRPr lang="en-IT"/>
           </a:p>
@@ -2373,7 +2372,7 @@
           <a:p>
             <a:fld id="{CC0F43FB-3F33-3F4B-9768-2FBED988F992}" type="slidenum">
               <a:rPr lang="en-IT" smtClean="0"/>
-              <a:t>54</a:t>
+              <a:t>53</a:t>
             </a:fld>
             <a:endParaRPr lang="en-IT"/>
           </a:p>
@@ -11558,7 +11557,7 @@
         </p:spPr>
         <p:txBody>
           <a:bodyPr>
-            <a:normAutofit lnSpcReduction="10000"/>
+            <a:normAutofit/>
           </a:bodyPr>
           <a:lstStyle/>
           <a:p>
@@ -11636,17 +11635,6 @@
               <a:rPr lang="en-US" sz="2200" dirty="0"/>
               <a:t>Interstitial fluid reached through minimally-invasive sensors or by reverse iontophoresis</a:t>
             </a:r>
-          </a:p>
-          <a:p>
-            <a:r>
-              <a:rPr lang="en-GB" sz="2200" dirty="0"/>
-              <a:t>When a new wearable chemical sensor is designed, the relationship between analyte concentration in the chosen biofluid and that in the traditional samples (e.g., blood) must be confirmed</a:t>
-            </a:r>
-            <a:r>
-              <a:rPr lang="en-GB" dirty="0"/>
-              <a:t>.</a:t>
-            </a:r>
-            <a:endParaRPr lang="en-US" sz="2600" dirty="0"/>
           </a:p>
         </p:txBody>
       </p:sp>
@@ -30118,275 +30106,6 @@
           <a:lstStyle/>
           <a:p>
             <a:r>
-              <a:rPr lang="en-US" dirty="0"/>
-              <a:t>3. Data storing and processing layer</a:t>
-            </a:r>
-          </a:p>
-        </p:txBody>
-      </p:sp>
-      <p:sp>
-        <p:nvSpPr>
-          <p:cNvPr id="6" name="Segnaposto contenuto 5"/>
-          <p:cNvSpPr>
-            <a:spLocks noGrp="1"/>
-          </p:cNvSpPr>
-          <p:nvPr>
-            <p:ph idx="1"/>
-          </p:nvPr>
-        </p:nvSpPr>
-        <p:spPr/>
-        <p:txBody>
-          <a:bodyPr>
-            <a:normAutofit/>
-          </a:bodyPr>
-          <a:lstStyle/>
-          <a:p>
-            <a:r>
-              <a:rPr lang="en-US" dirty="0"/>
-              <a:t>Layer responsible for data storing and complex processing</a:t>
-            </a:r>
-          </a:p>
-          <a:p>
-            <a:endParaRPr lang="en-US" dirty="0"/>
-          </a:p>
-          <a:p>
-            <a:r>
-              <a:rPr lang="en-US" dirty="0"/>
-              <a:t>Key components: </a:t>
-            </a:r>
-          </a:p>
-          <a:p>
-            <a:pPr lvl="1"/>
-            <a:r>
-              <a:rPr lang="en-US" b="1" dirty="0"/>
-              <a:t>Database</a:t>
-            </a:r>
-            <a:r>
-              <a:rPr lang="en-US" dirty="0"/>
-              <a:t> for structured data storing</a:t>
-            </a:r>
-          </a:p>
-          <a:p>
-            <a:pPr lvl="2"/>
-            <a:r>
-              <a:rPr lang="en-US" dirty="0"/>
-              <a:t>Data organized based on a specific data model (relational, hierarchical, object-oriented,…)</a:t>
-            </a:r>
-          </a:p>
-          <a:p>
-            <a:pPr lvl="2"/>
-            <a:endParaRPr lang="en-US" dirty="0"/>
-          </a:p>
-          <a:p>
-            <a:pPr lvl="1"/>
-            <a:r>
-              <a:rPr lang="en-US" b="1" dirty="0"/>
-              <a:t>Algorithms </a:t>
-            </a:r>
-            <a:r>
-              <a:rPr lang="en-US" dirty="0"/>
-              <a:t>for data processing</a:t>
-            </a:r>
-            <a:endParaRPr lang="en-US" b="1" dirty="0"/>
-          </a:p>
-          <a:p>
-            <a:pPr lvl="2"/>
-            <a:r>
-              <a:rPr lang="en-US" dirty="0"/>
-              <a:t>Statistical analysis</a:t>
-            </a:r>
-          </a:p>
-          <a:p>
-            <a:pPr lvl="2"/>
-            <a:r>
-              <a:rPr lang="en-US" dirty="0"/>
-              <a:t>Feature extraction (e.g., heart rate, calories expenditure, …)</a:t>
-            </a:r>
-          </a:p>
-          <a:p>
-            <a:pPr lvl="2"/>
-            <a:r>
-              <a:rPr lang="en-US" dirty="0"/>
-              <a:t>Signal processing (e.g., filtering, artifact removal, …)</a:t>
-            </a:r>
-          </a:p>
-          <a:p>
-            <a:pPr lvl="2"/>
-            <a:r>
-              <a:rPr lang="en-US" dirty="0"/>
-              <a:t>Data mining (e.g., cluster analysis, anomaly detection, sequential pattern extraction, …)</a:t>
-            </a:r>
-          </a:p>
-          <a:p>
-            <a:pPr lvl="2"/>
-            <a:r>
-              <a:rPr lang="en-US" dirty="0"/>
-              <a:t>Data modeling (knowledge-based, data-driven or hybrid approaches)</a:t>
-            </a:r>
-          </a:p>
-          <a:p>
-            <a:pPr lvl="2"/>
-            <a:r>
-              <a:rPr lang="en-US" dirty="0"/>
-              <a:t>Artificial intelligence (knowledge representation, machine learning, natural language processing, machine perception, automated planning, …)   </a:t>
-            </a:r>
-          </a:p>
-        </p:txBody>
-      </p:sp>
-      <p:sp>
-        <p:nvSpPr>
-          <p:cNvPr id="2" name="Segnaposto numero diapositiva 1"/>
-          <p:cNvSpPr>
-            <a:spLocks noGrp="1"/>
-          </p:cNvSpPr>
-          <p:nvPr>
-            <p:ph type="sldNum" sz="quarter" idx="12"/>
-          </p:nvPr>
-        </p:nvSpPr>
-        <p:spPr/>
-        <p:txBody>
-          <a:bodyPr/>
-          <a:lstStyle/>
-          <a:p>
-            <a:fld id="{31DE2C5B-556E-47B8-A792-024C2FCA4ACC}" type="slidenum">
-              <a:rPr lang="en-GB" smtClean="0"/>
-              <a:t>45</a:t>
-            </a:fld>
-            <a:endParaRPr lang="en-GB"/>
-          </a:p>
-        </p:txBody>
-      </p:sp>
-      <p:pic>
-        <p:nvPicPr>
-          <p:cNvPr id="3" name="Graphic 2" descr="Close with solid fill">
-            <a:extLst>
-              <a:ext uri="{FF2B5EF4-FFF2-40B4-BE49-F238E27FC236}">
-                <a16:creationId xmlns:a16="http://schemas.microsoft.com/office/drawing/2014/main" id="{58F3DF7F-A0A0-2EBA-9A79-F1103A961A2C}"/>
-              </a:ext>
-            </a:extLst>
-          </p:cNvPr>
-          <p:cNvPicPr>
-            <a:picLocks noChangeAspect="1"/>
-          </p:cNvPicPr>
-          <p:nvPr/>
-        </p:nvPicPr>
-        <p:blipFill>
-          <a:blip r:embed="rId2">
-            <a:extLst>
-              <a:ext uri="{28A0092B-C50C-407E-A947-70E740481C1C}">
-                <a14:useLocalDpi xmlns:a14="http://schemas.microsoft.com/office/drawing/2010/main" val="0"/>
-              </a:ext>
-              <a:ext uri="{96DAC541-7B7A-43D3-8B79-37D633B846F1}">
-                <asvg:svgBlip xmlns:asvg="http://schemas.microsoft.com/office/drawing/2016/SVG/main" r:embed="rId3"/>
-              </a:ext>
-            </a:extLst>
-          </a:blip>
-          <a:stretch>
-            <a:fillRect/>
-          </a:stretch>
-        </p:blipFill>
-        <p:spPr>
-          <a:xfrm>
-            <a:off x="-383058" y="2669060"/>
-            <a:ext cx="12575058" cy="651246"/>
-          </a:xfrm>
-          <a:prstGeom prst="rect">
-            <a:avLst/>
-          </a:prstGeom>
-        </p:spPr>
-      </p:pic>
-      <p:sp>
-        <p:nvSpPr>
-          <p:cNvPr id="7" name="TextBox 6">
-            <a:extLst>
-              <a:ext uri="{FF2B5EF4-FFF2-40B4-BE49-F238E27FC236}">
-                <a16:creationId xmlns:a16="http://schemas.microsoft.com/office/drawing/2014/main" id="{8E420B5D-6854-0831-7228-34ECA5D9F499}"/>
-              </a:ext>
-            </a:extLst>
-          </p:cNvPr>
-          <p:cNvSpPr txBox="1"/>
-          <p:nvPr/>
-        </p:nvSpPr>
-        <p:spPr>
-          <a:xfrm>
-            <a:off x="6655143" y="2170859"/>
-            <a:ext cx="2469402" cy="369332"/>
-          </a:xfrm>
-          <a:prstGeom prst="rect">
-            <a:avLst/>
-          </a:prstGeom>
-          <a:solidFill>
-            <a:srgbClr val="FFFF00"/>
-          </a:solidFill>
-          <a:ln>
-            <a:solidFill>
-              <a:srgbClr val="C00000"/>
-            </a:solidFill>
-          </a:ln>
-        </p:spPr>
-        <p:txBody>
-          <a:bodyPr wrap="square">
-            <a:spAutoFit/>
-          </a:bodyPr>
-          <a:lstStyle/>
-          <a:p>
-            <a:pPr algn="ctr"/>
-            <a:r>
-              <a:rPr lang="en-US" b="1" dirty="0">
-                <a:latin typeface="Aptos" panose="020B0004020202020204" pitchFamily="34" charset="0"/>
-                <a:ea typeface="Palatino" pitchFamily="2" charset="77"/>
-              </a:rPr>
-              <a:t>Topic not covered</a:t>
-            </a:r>
-          </a:p>
-        </p:txBody>
-      </p:sp>
-    </p:spTree>
-    <p:extLst>
-      <p:ext uri="{BB962C8B-B14F-4D97-AF65-F5344CB8AC3E}">
-        <p14:creationId xmlns:p14="http://schemas.microsoft.com/office/powerpoint/2010/main" val="1585463429"/>
-      </p:ext>
-    </p:extLst>
-  </p:cSld>
-  <p:clrMapOvr>
-    <a:masterClrMapping/>
-  </p:clrMapOvr>
-</p:sld>
-</file>
-
-<file path=ppt/slides/slide46.xml><?xml version="1.0" encoding="utf-8"?>
-<p:sld xmlns:a="http://schemas.openxmlformats.org/drawingml/2006/main" xmlns:r="http://schemas.openxmlformats.org/officeDocument/2006/relationships" xmlns:p="http://schemas.openxmlformats.org/presentationml/2006/main">
-  <p:cSld>
-    <p:spTree>
-      <p:nvGrpSpPr>
-        <p:cNvPr id="1" name=""/>
-        <p:cNvGrpSpPr/>
-        <p:nvPr/>
-      </p:nvGrpSpPr>
-      <p:grpSpPr>
-        <a:xfrm>
-          <a:off x="0" y="0"/>
-          <a:ext cx="0" cy="0"/>
-          <a:chOff x="0" y="0"/>
-          <a:chExt cx="0" cy="0"/>
-        </a:xfrm>
-      </p:grpSpPr>
-      <p:sp>
-        <p:nvSpPr>
-          <p:cNvPr id="5" name="Titolo 4"/>
-          <p:cNvSpPr>
-            <a:spLocks noGrp="1"/>
-          </p:cNvSpPr>
-          <p:nvPr>
-            <p:ph type="title"/>
-          </p:nvPr>
-        </p:nvSpPr>
-        <p:spPr/>
-        <p:txBody>
-          <a:bodyPr/>
-          <a:lstStyle/>
-          <a:p>
-            <a:r>
               <a:rPr lang="it-IT" dirty="0"/>
               <a:t>4. Application </a:t>
             </a:r>
@@ -30775,7 +30494,7 @@
           <a:p>
             <a:fld id="{31DE2C5B-556E-47B8-A792-024C2FCA4ACC}" type="slidenum">
               <a:rPr lang="en-GB" smtClean="0"/>
-              <a:t>46</a:t>
+              <a:t>45</a:t>
             </a:fld>
             <a:endParaRPr lang="en-GB"/>
           </a:p>
@@ -30794,7 +30513,7 @@
 </p:sld>
 </file>
 
-<file path=ppt/slides/slide47.xml><?xml version="1.0" encoding="utf-8"?>
+<file path=ppt/slides/slide46.xml><?xml version="1.0" encoding="utf-8"?>
 <p:sld xmlns:a="http://schemas.openxmlformats.org/drawingml/2006/main" xmlns:r="http://schemas.openxmlformats.org/officeDocument/2006/relationships" xmlns:p="http://schemas.openxmlformats.org/presentationml/2006/main">
   <p:cSld>
     <p:spTree>
@@ -30867,7 +30586,7 @@
           <a:p>
             <a:fld id="{31DE2C5B-556E-47B8-A792-024C2FCA4ACC}" type="slidenum">
               <a:rPr lang="en-GB" smtClean="0"/>
-              <a:t>47</a:t>
+              <a:t>46</a:t>
             </a:fld>
             <a:endParaRPr lang="en-GB"/>
           </a:p>
@@ -30886,7 +30605,7 @@
 </p:sld>
 </file>
 
-<file path=ppt/slides/slide48.xml><?xml version="1.0" encoding="utf-8"?>
+<file path=ppt/slides/slide47.xml><?xml version="1.0" encoding="utf-8"?>
 <p:sld xmlns:a="http://schemas.openxmlformats.org/drawingml/2006/main" xmlns:r="http://schemas.openxmlformats.org/officeDocument/2006/relationships" xmlns:p="http://schemas.openxmlformats.org/presentationml/2006/main">
   <p:cSld>
     <p:spTree>
@@ -31023,7 +30742,7 @@
           <a:p>
             <a:fld id="{31DE2C5B-556E-47B8-A792-024C2FCA4ACC}" type="slidenum">
               <a:rPr lang="en-GB" smtClean="0"/>
-              <a:t>48</a:t>
+              <a:t>47</a:t>
             </a:fld>
             <a:endParaRPr lang="en-GB" dirty="0"/>
           </a:p>
@@ -31378,7 +31097,7 @@
 </p:sld>
 </file>
 
-<file path=ppt/slides/slide49.xml><?xml version="1.0" encoding="utf-8"?>
+<file path=ppt/slides/slide48.xml><?xml version="1.0" encoding="utf-8"?>
 <p:sld xmlns:a="http://schemas.openxmlformats.org/drawingml/2006/main" xmlns:r="http://schemas.openxmlformats.org/officeDocument/2006/relationships" xmlns:p="http://schemas.openxmlformats.org/presentationml/2006/main">
   <p:cSld>
     <p:spTree>
@@ -31526,7 +31245,7 @@
           <a:p>
             <a:fld id="{31DE2C5B-556E-47B8-A792-024C2FCA4ACC}" type="slidenum">
               <a:rPr lang="en-GB" smtClean="0"/>
-              <a:t>49</a:t>
+              <a:t>48</a:t>
             </a:fld>
             <a:endParaRPr lang="en-GB" dirty="0"/>
           </a:p>
@@ -31888,191 +31607,7 @@
 </p:sld>
 </file>
 
-<file path=ppt/slides/slide5.xml><?xml version="1.0" encoding="utf-8"?>
-<p:sld xmlns:a="http://schemas.openxmlformats.org/drawingml/2006/main" xmlns:r="http://schemas.openxmlformats.org/officeDocument/2006/relationships" xmlns:p="http://schemas.openxmlformats.org/presentationml/2006/main">
-  <p:cSld>
-    <p:spTree>
-      <p:nvGrpSpPr>
-        <p:cNvPr id="1" name=""/>
-        <p:cNvGrpSpPr/>
-        <p:nvPr/>
-      </p:nvGrpSpPr>
-      <p:grpSpPr>
-        <a:xfrm>
-          <a:off x="0" y="0"/>
-          <a:ext cx="0" cy="0"/>
-          <a:chOff x="0" y="0"/>
-          <a:chExt cx="0" cy="0"/>
-        </a:xfrm>
-      </p:grpSpPr>
-      <p:sp>
-        <p:nvSpPr>
-          <p:cNvPr id="5" name="Titolo 4"/>
-          <p:cNvSpPr>
-            <a:spLocks noGrp="1"/>
-          </p:cNvSpPr>
-          <p:nvPr>
-            <p:ph type="title"/>
-          </p:nvPr>
-        </p:nvSpPr>
-        <p:spPr/>
-        <p:txBody>
-          <a:bodyPr/>
-          <a:lstStyle/>
-          <a:p>
-            <a:r>
-              <a:rPr lang="it-IT" dirty="0"/>
-              <a:t>Theory </a:t>
-            </a:r>
-            <a:r>
-              <a:rPr lang="it-IT" dirty="0" err="1"/>
-              <a:t>program</a:t>
-            </a:r>
-            <a:endParaRPr lang="en-GB" dirty="0"/>
-          </a:p>
-        </p:txBody>
-      </p:sp>
-      <p:sp>
-        <p:nvSpPr>
-          <p:cNvPr id="6" name="Segnaposto contenuto 5"/>
-          <p:cNvSpPr>
-            <a:spLocks noGrp="1"/>
-          </p:cNvSpPr>
-          <p:nvPr>
-            <p:ph idx="1"/>
-          </p:nvPr>
-        </p:nvSpPr>
-        <p:spPr/>
-        <p:txBody>
-          <a:bodyPr>
-            <a:normAutofit/>
-          </a:bodyPr>
-          <a:lstStyle/>
-          <a:p>
-            <a:r>
-              <a:rPr lang="en-GB" dirty="0"/>
-              <a:t>The theoretical part of the course will cover the following:</a:t>
-            </a:r>
-          </a:p>
-          <a:p>
-            <a:pPr lvl="1"/>
-            <a:r>
-              <a:rPr lang="en-GB" dirty="0"/>
-              <a:t>Wearable sensor technologies</a:t>
-            </a:r>
-          </a:p>
-          <a:p>
-            <a:pPr lvl="1"/>
-            <a:r>
-              <a:rPr lang="en-GB" dirty="0"/>
-              <a:t>Health design thinking</a:t>
-            </a:r>
-          </a:p>
-          <a:p>
-            <a:pPr lvl="1"/>
-            <a:r>
-              <a:rPr lang="en-GB" dirty="0"/>
-              <a:t>Elements of UI/UX Design</a:t>
-            </a:r>
-          </a:p>
-          <a:p>
-            <a:pPr lvl="1"/>
-            <a:r>
-              <a:rPr lang="en-GB" dirty="0"/>
-              <a:t>Evaluation of app usability</a:t>
-            </a:r>
-          </a:p>
-          <a:p>
-            <a:pPr lvl="1"/>
-            <a:r>
-              <a:rPr lang="en-GB" dirty="0"/>
-              <a:t>Fundamentals of network architectures and the HTTP communication protocol</a:t>
-            </a:r>
-          </a:p>
-          <a:p>
-            <a:pPr lvl="1"/>
-            <a:r>
-              <a:rPr lang="en-GB" dirty="0"/>
-              <a:t>The representational state transfer (REST) paradigm</a:t>
-            </a:r>
-          </a:p>
-          <a:p>
-            <a:pPr lvl="1"/>
-            <a:r>
-              <a:rPr lang="en-GB" dirty="0"/>
-              <a:t>Application programming interfaces (APIs)</a:t>
-            </a:r>
-          </a:p>
-          <a:p>
-            <a:pPr lvl="1"/>
-            <a:r>
-              <a:rPr lang="en-GB" dirty="0"/>
-              <a:t>Elements of network security</a:t>
-            </a:r>
-          </a:p>
-          <a:p>
-            <a:pPr lvl="1"/>
-            <a:r>
-              <a:rPr lang="en-GB" dirty="0"/>
-              <a:t>Authentication protocols</a:t>
-            </a:r>
-          </a:p>
-          <a:p>
-            <a:pPr lvl="1"/>
-            <a:r>
-              <a:rPr lang="en-GB" dirty="0"/>
-              <a:t>Regulation for health data management</a:t>
-            </a:r>
-          </a:p>
-          <a:p>
-            <a:pPr lvl="1"/>
-            <a:endParaRPr lang="it-IT" dirty="0"/>
-          </a:p>
-          <a:p>
-            <a:endParaRPr lang="it-IT" dirty="0"/>
-          </a:p>
-          <a:p>
-            <a:endParaRPr lang="it-IT" dirty="0"/>
-          </a:p>
-        </p:txBody>
-      </p:sp>
-      <p:sp>
-        <p:nvSpPr>
-          <p:cNvPr id="2" name="Segnaposto numero diapositiva 1"/>
-          <p:cNvSpPr>
-            <a:spLocks noGrp="1"/>
-          </p:cNvSpPr>
-          <p:nvPr>
-            <p:ph type="sldNum" sz="quarter" idx="12"/>
-          </p:nvPr>
-        </p:nvSpPr>
-        <p:spPr/>
-        <p:txBody>
-          <a:bodyPr/>
-          <a:lstStyle/>
-          <a:p>
-            <a:fld id="{31DE2C5B-556E-47B8-A792-024C2FCA4ACC}" type="slidenum">
-              <a:rPr lang="en-GB" smtClean="0"/>
-              <a:t>5</a:t>
-            </a:fld>
-            <a:endParaRPr lang="en-GB"/>
-          </a:p>
-        </p:txBody>
-      </p:sp>
-    </p:spTree>
-    <p:extLst>
-      <p:ext uri="{BB962C8B-B14F-4D97-AF65-F5344CB8AC3E}">
-        <p14:creationId xmlns:p14="http://schemas.microsoft.com/office/powerpoint/2010/main" val="1427573288"/>
-      </p:ext>
-    </p:extLst>
-  </p:cSld>
-  <p:clrMapOvr>
-    <a:masterClrMapping/>
-  </p:clrMapOvr>
-</p:sld>
-</file>
-
-<file path=ppt/slides/slide50.xml><?xml version="1.0" encoding="utf-8"?>
+<file path=ppt/slides/slide49.xml><?xml version="1.0" encoding="utf-8"?>
 <p:sld xmlns:a="http://schemas.openxmlformats.org/drawingml/2006/main" xmlns:r="http://schemas.openxmlformats.org/officeDocument/2006/relationships" xmlns:p="http://schemas.openxmlformats.org/presentationml/2006/main">
   <p:cSld>
     <p:spTree>
@@ -32241,7 +31776,7 @@
           <a:p>
             <a:fld id="{31DE2C5B-556E-47B8-A792-024C2FCA4ACC}" type="slidenum">
               <a:rPr lang="en-GB" smtClean="0"/>
-              <a:t>50</a:t>
+              <a:t>49</a:t>
             </a:fld>
             <a:endParaRPr lang="en-GB" dirty="0"/>
           </a:p>
@@ -32601,7 +32136,191 @@
 </p:sld>
 </file>
 
-<file path=ppt/slides/slide51.xml><?xml version="1.0" encoding="utf-8"?>
+<file path=ppt/slides/slide5.xml><?xml version="1.0" encoding="utf-8"?>
+<p:sld xmlns:a="http://schemas.openxmlformats.org/drawingml/2006/main" xmlns:r="http://schemas.openxmlformats.org/officeDocument/2006/relationships" xmlns:p="http://schemas.openxmlformats.org/presentationml/2006/main">
+  <p:cSld>
+    <p:spTree>
+      <p:nvGrpSpPr>
+        <p:cNvPr id="1" name=""/>
+        <p:cNvGrpSpPr/>
+        <p:nvPr/>
+      </p:nvGrpSpPr>
+      <p:grpSpPr>
+        <a:xfrm>
+          <a:off x="0" y="0"/>
+          <a:ext cx="0" cy="0"/>
+          <a:chOff x="0" y="0"/>
+          <a:chExt cx="0" cy="0"/>
+        </a:xfrm>
+      </p:grpSpPr>
+      <p:sp>
+        <p:nvSpPr>
+          <p:cNvPr id="5" name="Titolo 4"/>
+          <p:cNvSpPr>
+            <a:spLocks noGrp="1"/>
+          </p:cNvSpPr>
+          <p:nvPr>
+            <p:ph type="title"/>
+          </p:nvPr>
+        </p:nvSpPr>
+        <p:spPr/>
+        <p:txBody>
+          <a:bodyPr/>
+          <a:lstStyle/>
+          <a:p>
+            <a:r>
+              <a:rPr lang="it-IT" dirty="0"/>
+              <a:t>Theory </a:t>
+            </a:r>
+            <a:r>
+              <a:rPr lang="it-IT" dirty="0" err="1"/>
+              <a:t>program</a:t>
+            </a:r>
+            <a:endParaRPr lang="en-GB" dirty="0"/>
+          </a:p>
+        </p:txBody>
+      </p:sp>
+      <p:sp>
+        <p:nvSpPr>
+          <p:cNvPr id="6" name="Segnaposto contenuto 5"/>
+          <p:cNvSpPr>
+            <a:spLocks noGrp="1"/>
+          </p:cNvSpPr>
+          <p:nvPr>
+            <p:ph idx="1"/>
+          </p:nvPr>
+        </p:nvSpPr>
+        <p:spPr/>
+        <p:txBody>
+          <a:bodyPr>
+            <a:normAutofit/>
+          </a:bodyPr>
+          <a:lstStyle/>
+          <a:p>
+            <a:r>
+              <a:rPr lang="en-GB" dirty="0"/>
+              <a:t>The theoretical part of the course will cover the following:</a:t>
+            </a:r>
+          </a:p>
+          <a:p>
+            <a:pPr lvl="1"/>
+            <a:r>
+              <a:rPr lang="en-GB" dirty="0"/>
+              <a:t>Wearable sensor technologies</a:t>
+            </a:r>
+          </a:p>
+          <a:p>
+            <a:pPr lvl="1"/>
+            <a:r>
+              <a:rPr lang="en-GB" dirty="0"/>
+              <a:t>Health design thinking</a:t>
+            </a:r>
+          </a:p>
+          <a:p>
+            <a:pPr lvl="1"/>
+            <a:r>
+              <a:rPr lang="en-GB" dirty="0"/>
+              <a:t>Elements of UI/UX Design</a:t>
+            </a:r>
+          </a:p>
+          <a:p>
+            <a:pPr lvl="1"/>
+            <a:r>
+              <a:rPr lang="en-GB" dirty="0"/>
+              <a:t>Evaluation of app usability</a:t>
+            </a:r>
+          </a:p>
+          <a:p>
+            <a:pPr lvl="1"/>
+            <a:r>
+              <a:rPr lang="en-GB" dirty="0"/>
+              <a:t>Fundamentals of network architectures and the HTTP communication protocol</a:t>
+            </a:r>
+          </a:p>
+          <a:p>
+            <a:pPr lvl="1"/>
+            <a:r>
+              <a:rPr lang="en-GB" dirty="0"/>
+              <a:t>The representational state transfer (REST) paradigm</a:t>
+            </a:r>
+          </a:p>
+          <a:p>
+            <a:pPr lvl="1"/>
+            <a:r>
+              <a:rPr lang="en-GB" dirty="0"/>
+              <a:t>Application programming interfaces (APIs)</a:t>
+            </a:r>
+          </a:p>
+          <a:p>
+            <a:pPr lvl="1"/>
+            <a:r>
+              <a:rPr lang="en-GB" dirty="0"/>
+              <a:t>Elements of network security</a:t>
+            </a:r>
+          </a:p>
+          <a:p>
+            <a:pPr lvl="1"/>
+            <a:r>
+              <a:rPr lang="en-GB" dirty="0"/>
+              <a:t>Authentication protocols</a:t>
+            </a:r>
+          </a:p>
+          <a:p>
+            <a:pPr lvl="1"/>
+            <a:r>
+              <a:rPr lang="en-GB" dirty="0"/>
+              <a:t>Regulation for health data management</a:t>
+            </a:r>
+          </a:p>
+          <a:p>
+            <a:pPr lvl="1"/>
+            <a:endParaRPr lang="it-IT" dirty="0"/>
+          </a:p>
+          <a:p>
+            <a:endParaRPr lang="it-IT" dirty="0"/>
+          </a:p>
+          <a:p>
+            <a:endParaRPr lang="it-IT" dirty="0"/>
+          </a:p>
+        </p:txBody>
+      </p:sp>
+      <p:sp>
+        <p:nvSpPr>
+          <p:cNvPr id="2" name="Segnaposto numero diapositiva 1"/>
+          <p:cNvSpPr>
+            <a:spLocks noGrp="1"/>
+          </p:cNvSpPr>
+          <p:nvPr>
+            <p:ph type="sldNum" sz="quarter" idx="12"/>
+          </p:nvPr>
+        </p:nvSpPr>
+        <p:spPr/>
+        <p:txBody>
+          <a:bodyPr/>
+          <a:lstStyle/>
+          <a:p>
+            <a:fld id="{31DE2C5B-556E-47B8-A792-024C2FCA4ACC}" type="slidenum">
+              <a:rPr lang="en-GB" smtClean="0"/>
+              <a:t>5</a:t>
+            </a:fld>
+            <a:endParaRPr lang="en-GB"/>
+          </a:p>
+        </p:txBody>
+      </p:sp>
+    </p:spTree>
+    <p:extLst>
+      <p:ext uri="{BB962C8B-B14F-4D97-AF65-F5344CB8AC3E}">
+        <p14:creationId xmlns:p14="http://schemas.microsoft.com/office/powerpoint/2010/main" val="1427573288"/>
+      </p:ext>
+    </p:extLst>
+  </p:cSld>
+  <p:clrMapOvr>
+    <a:masterClrMapping/>
+  </p:clrMapOvr>
+</p:sld>
+</file>
+
+<file path=ppt/slides/slide50.xml><?xml version="1.0" encoding="utf-8"?>
 <p:sld xmlns:a="http://schemas.openxmlformats.org/drawingml/2006/main" xmlns:r="http://schemas.openxmlformats.org/officeDocument/2006/relationships" xmlns:p="http://schemas.openxmlformats.org/presentationml/2006/main">
   <p:cSld>
     <p:spTree>
@@ -32771,7 +32490,7 @@
           <a:p>
             <a:fld id="{31DE2C5B-556E-47B8-A792-024C2FCA4ACC}" type="slidenum">
               <a:rPr lang="en-GB" smtClean="0"/>
-              <a:t>51</a:t>
+              <a:t>50</a:t>
             </a:fld>
             <a:endParaRPr lang="en-GB" dirty="0"/>
           </a:p>
@@ -33210,7 +32929,7 @@
 </p:sld>
 </file>
 
-<file path=ppt/slides/slide52.xml><?xml version="1.0" encoding="utf-8"?>
+<file path=ppt/slides/slide51.xml><?xml version="1.0" encoding="utf-8"?>
 <p:sld xmlns:a="http://schemas.openxmlformats.org/drawingml/2006/main" xmlns:r="http://schemas.openxmlformats.org/officeDocument/2006/relationships" xmlns:p="http://schemas.openxmlformats.org/presentationml/2006/main">
   <p:cSld>
     <p:spTree>
@@ -33373,7 +33092,7 @@
           <a:p>
             <a:fld id="{31DE2C5B-556E-47B8-A792-024C2FCA4ACC}" type="slidenum">
               <a:rPr lang="en-GB" smtClean="0"/>
-              <a:t>52</a:t>
+              <a:t>51</a:t>
             </a:fld>
             <a:endParaRPr lang="en-GB" dirty="0"/>
           </a:p>
@@ -33466,7 +33185,7 @@
 </p:sld>
 </file>
 
-<file path=ppt/slides/slide53.xml><?xml version="1.0" encoding="utf-8"?>
+<file path=ppt/slides/slide52.xml><?xml version="1.0" encoding="utf-8"?>
 <p:sld xmlns:a="http://schemas.openxmlformats.org/drawingml/2006/main" xmlns:r="http://schemas.openxmlformats.org/officeDocument/2006/relationships" xmlns:p="http://schemas.openxmlformats.org/presentationml/2006/main">
   <p:cSld>
     <p:spTree>
@@ -33720,7 +33439,7 @@
           <a:p>
             <a:fld id="{31DE2C5B-556E-47B8-A792-024C2FCA4ACC}" type="slidenum">
               <a:rPr lang="en-GB" smtClean="0"/>
-              <a:t>53</a:t>
+              <a:t>52</a:t>
             </a:fld>
             <a:endParaRPr lang="en-GB" dirty="0"/>
           </a:p>
@@ -35130,7 +34849,7 @@
 </p:sld>
 </file>
 
-<file path=ppt/slides/slide54.xml><?xml version="1.0" encoding="utf-8"?>
+<file path=ppt/slides/slide53.xml><?xml version="1.0" encoding="utf-8"?>
 <p:sld xmlns:a="http://schemas.openxmlformats.org/drawingml/2006/main" xmlns:r="http://schemas.openxmlformats.org/officeDocument/2006/relationships" xmlns:p="http://schemas.openxmlformats.org/presentationml/2006/main">
   <p:cSld>
     <p:spTree>
@@ -35364,7 +35083,7 @@
           <a:p>
             <a:fld id="{31DE2C5B-556E-47B8-A792-024C2FCA4ACC}" type="slidenum">
               <a:rPr lang="en-GB" smtClean="0"/>
-              <a:t>54</a:t>
+              <a:t>53</a:t>
             </a:fld>
             <a:endParaRPr lang="en-GB" dirty="0"/>
           </a:p>

--- a/lesson_01-introduction_and_wearables/lesson_01-introduction_and_wearables.pptx
+++ b/lesson_01-introduction_and_wearables/lesson_01-introduction_and_wearables.pptx
@@ -1031,7 +1031,7 @@
           <a:p>
             <a:fld id="{60DFD464-F8EE-42BA-9BEF-F6DE8365F087}" type="datetimeFigureOut">
               <a:rPr lang="en-GB" smtClean="0"/>
-              <a:t>23/02/2026</a:t>
+              <a:t>24/02/2026</a:t>
             </a:fld>
             <a:endParaRPr lang="en-GB"/>
           </a:p>
@@ -26636,6 +26636,60 @@
           </a:p>
         </p:txBody>
       </p:sp>
+      <p:sp>
+        <p:nvSpPr>
+          <p:cNvPr id="7" name="TextBox 6">
+            <a:extLst>
+              <a:ext uri="{FF2B5EF4-FFF2-40B4-BE49-F238E27FC236}">
+                <a16:creationId xmlns:a16="http://schemas.microsoft.com/office/drawing/2014/main" id="{4BD8C450-B45C-0736-C38D-46DFB8158F21}"/>
+              </a:ext>
+            </a:extLst>
+          </p:cNvPr>
+          <p:cNvSpPr txBox="1"/>
+          <p:nvPr/>
+        </p:nvSpPr>
+        <p:spPr>
+          <a:xfrm>
+            <a:off x="10381670" y="407381"/>
+            <a:ext cx="1265382" cy="369332"/>
+          </a:xfrm>
+          <a:prstGeom prst="rect">
+            <a:avLst/>
+          </a:prstGeom>
+        </p:spPr>
+        <p:style>
+          <a:lnRef idx="2">
+            <a:schemeClr val="accent6">
+              <a:shade val="50000"/>
+            </a:schemeClr>
+          </a:lnRef>
+          <a:fillRef idx="1">
+            <a:schemeClr val="accent6"/>
+          </a:fillRef>
+          <a:effectRef idx="0">
+            <a:schemeClr val="accent6"/>
+          </a:effectRef>
+          <a:fontRef idx="minor">
+            <a:schemeClr val="lt1"/>
+          </a:fontRef>
+        </p:style>
+        <p:txBody>
+          <a:bodyPr wrap="square" rtlCol="0" anchor="ctr">
+            <a:spAutoFit/>
+          </a:bodyPr>
+          <a:lstStyle/>
+          <a:p>
+            <a:pPr algn="ctr"/>
+            <a:r>
+              <a:rPr lang="en-IT" dirty="0">
+                <a:latin typeface="Aptos" panose="020B0004020202020204" pitchFamily="34" charset="0"/>
+                <a:ea typeface="Palatino" pitchFamily="2" charset="77"/>
+              </a:rPr>
+              <a:t>BONUS</a:t>
+            </a:r>
+          </a:p>
+        </p:txBody>
+      </p:sp>
     </p:spTree>
     <p:extLst>
       <p:ext uri="{BB962C8B-B14F-4D97-AF65-F5344CB8AC3E}">
